--- a/rapports/septembre/Basket4Ballers_sept2026.pptx
+++ b/rapports/septembre/Basket4Ballers_sept2026.pptx
@@ -6235,7 +6235,7 @@
         <p:spPr>
           <a:xfrm>
             <a:off x="8296656" y="4389120"/>
-            <a:ext cx="2072640" cy="152400"/>
+            <a:ext cx="2225040" cy="152400"/>
           </a:xfrm>
           <a:prstGeom prst="rect">
             <a:avLst/>
@@ -6256,7 +6256,7 @@
                 </a:solidFill>
                 <a:latin typeface="Arial"/>
               </a:rPr>
-              <a:t>Chaussures de ville et mode</a:t>
+              <a:t>Chaussures et sneakers</a:t>
             </a:r>
           </a:p>
         </p:txBody>
@@ -6314,7 +6314,7 @@
         <p:spPr>
           <a:xfrm>
             <a:off x="8296656" y="4657344"/>
-            <a:ext cx="2072640" cy="152400"/>
+            <a:ext cx="2225040" cy="152400"/>
           </a:xfrm>
           <a:prstGeom prst="rect">
             <a:avLst/>
@@ -6335,7 +6335,7 @@
                 </a:solidFill>
                 <a:latin typeface="Arial"/>
               </a:rPr>
-              <a:t>Running et chaussures de sport · 12 %</a:t>
+              <a:t>Équipement de basketball · 5 %</a:t>
             </a:r>
           </a:p>
         </p:txBody>
@@ -6393,7 +6393,7 @@
         <p:spPr>
           <a:xfrm>
             <a:off x="8296656" y="4925568"/>
-            <a:ext cx="2072640" cy="152400"/>
+            <a:ext cx="2225040" cy="152400"/>
           </a:xfrm>
           <a:prstGeom prst="rect">
             <a:avLst/>
@@ -6414,7 +6414,7 @@
                 </a:solidFill>
                 <a:latin typeface="Arial"/>
               </a:rPr>
-              <a:t>Baskets et sneakers · 8 %</a:t>
+              <a:t>Maillots et fanwear NBA · 4 %</a:t>
             </a:r>
           </a:p>
         </p:txBody>
@@ -6472,7 +6472,7 @@
         <p:spPr>
           <a:xfrm>
             <a:off x="8296656" y="5193792"/>
-            <a:ext cx="2072640" cy="152400"/>
+            <a:ext cx="2225040" cy="152400"/>
           </a:xfrm>
           <a:prstGeom prst="rect">
             <a:avLst/>
@@ -6493,7 +6493,7 @@
                 </a:solidFill>
                 <a:latin typeface="Arial"/>
               </a:rPr>
-              <a:t>Outdoor et montagne · 8 %</a:t>
+              <a:t>Vêtements de basketball · 1 %</a:t>
             </a:r>
           </a:p>
         </p:txBody>
@@ -6506,87 +6506,8 @@
         </p:nvSpPr>
         <p:spPr>
           <a:xfrm>
-            <a:off x="8077200" y="5480304"/>
-            <a:ext cx="121920" cy="121920"/>
-          </a:xfrm>
-          <a:prstGeom prst="rect">
-            <a:avLst/>
-          </a:prstGeom>
-          <a:solidFill>
-            <a:srgbClr val="3E5A78"/>
-          </a:solidFill>
-          <a:ln>
-            <a:noFill/>
-          </a:ln>
-          <a:effectLst/>
-        </p:spPr>
-        <p:style>
-          <a:lnRef idx="1">
-            <a:schemeClr val="accent1"/>
-          </a:lnRef>
-          <a:fillRef idx="3">
-            <a:schemeClr val="accent1"/>
-          </a:fillRef>
-          <a:effectRef idx="2">
-            <a:schemeClr val="accent1"/>
-          </a:effectRef>
-          <a:fontRef idx="minor">
-            <a:schemeClr val="lt1"/>
-          </a:fontRef>
-        </p:style>
-        <p:txBody>
-          <a:bodyPr rtlCol="0" anchor="ctr"/>
-          <a:lstStyle/>
-          <a:p>
-            <a:pPr algn="ctr"/>
-          </a:p>
-        </p:txBody>
-      </p:sp>
-      <p:sp>
-        <p:nvSpPr>
-          <p:cNvPr id="89" name="TextBox 88"/>
-          <p:cNvSpPr txBox="1"/>
-          <p:nvPr/>
-        </p:nvSpPr>
-        <p:spPr>
-          <a:xfrm>
-            <a:off x="8296656" y="5462016"/>
-            <a:ext cx="2072640" cy="152400"/>
-          </a:xfrm>
-          <a:prstGeom prst="rect">
-            <a:avLst/>
-          </a:prstGeom>
-          <a:noFill/>
-        </p:spPr>
-        <p:txBody>
-          <a:bodyPr wrap="square" anchor="t" lIns="0" rIns="0" tIns="0" bIns="0">
-            <a:spAutoFit/>
-          </a:bodyPr>
-          <a:lstStyle/>
-          <a:p>
-            <a:pPr algn="l"/>
-            <a:r>
-              <a:rPr sz="1000" b="0" i="0">
-                <a:solidFill>
-                  <a:srgbClr val="111111"/>
-                </a:solidFill>
-                <a:latin typeface="Arial"/>
-              </a:rPr>
-              <a:t>Équipement de basket-ball · &lt; 1 %</a:t>
-            </a:r>
-          </a:p>
-        </p:txBody>
-      </p:sp>
-      <p:sp>
-        <p:nvSpPr>
-          <p:cNvPr id="90" name="Rectangle 89"/>
-          <p:cNvSpPr/>
-          <p:nvPr/>
-        </p:nvSpPr>
-        <p:spPr>
-          <a:xfrm>
             <a:off x="10564368" y="4450080"/>
-            <a:ext cx="475488" cy="952195"/>
+            <a:ext cx="475488" cy="1207008"/>
           </a:xfrm>
           <a:prstGeom prst="rect">
             <a:avLst/>
@@ -6623,14 +6544,14 @@
       </p:sp>
       <p:sp>
         <p:nvSpPr>
-          <p:cNvPr id="91" name="TextBox 90"/>
+          <p:cNvPr id="89" name="TextBox 88"/>
           <p:cNvSpPr txBox="1"/>
           <p:nvPr/>
         </p:nvSpPr>
         <p:spPr>
           <a:xfrm>
             <a:off x="10564368" y="4450080"/>
-            <a:ext cx="475488" cy="952195"/>
+            <a:ext cx="475488" cy="1207008"/>
           </a:xfrm>
           <a:prstGeom prst="rect">
             <a:avLst/>
@@ -6651,21 +6572,21 @@
                 </a:solidFill>
                 <a:latin typeface="Arial"/>
               </a:rPr>
-              <a:t>71 %</a:t>
-            </a:r>
-          </a:p>
-        </p:txBody>
-      </p:sp>
-      <p:sp>
-        <p:nvSpPr>
-          <p:cNvPr id="92" name="Rectangle 91"/>
+              <a:t>90 %</a:t>
+            </a:r>
+          </a:p>
+        </p:txBody>
+      </p:sp>
+      <p:sp>
+        <p:nvSpPr>
+          <p:cNvPr id="90" name="Rectangle 89"/>
           <p:cNvSpPr/>
           <p:nvPr/>
         </p:nvSpPr>
         <p:spPr>
           <a:xfrm>
-            <a:off x="10564368" y="5402275"/>
-            <a:ext cx="475488" cy="160934"/>
+            <a:off x="10564368" y="5657088"/>
+            <a:ext cx="475488" cy="67056"/>
           </a:xfrm>
           <a:prstGeom prst="rect">
             <a:avLst/>
@@ -6702,14 +6623,14 @@
       </p:sp>
       <p:sp>
         <p:nvSpPr>
-          <p:cNvPr id="93" name="Rectangle 92"/>
+          <p:cNvPr id="91" name="Rectangle 90"/>
           <p:cNvSpPr/>
           <p:nvPr/>
         </p:nvSpPr>
         <p:spPr>
           <a:xfrm>
-            <a:off x="10564368" y="5563209"/>
-            <a:ext cx="475488" cy="107289"/>
+            <a:off x="10564368" y="5724144"/>
+            <a:ext cx="475488" cy="53644"/>
           </a:xfrm>
           <a:prstGeom prst="rect">
             <a:avLst/>
@@ -6746,64 +6667,20 @@
       </p:sp>
       <p:sp>
         <p:nvSpPr>
-          <p:cNvPr id="94" name="Rectangle 93"/>
+          <p:cNvPr id="92" name="Rectangle 91"/>
           <p:cNvSpPr/>
           <p:nvPr/>
         </p:nvSpPr>
         <p:spPr>
           <a:xfrm>
-            <a:off x="10564368" y="5670499"/>
-            <a:ext cx="475488" cy="107289"/>
+            <a:off x="10564368" y="5777788"/>
+            <a:ext cx="475488" cy="13411"/>
           </a:xfrm>
           <a:prstGeom prst="rect">
             <a:avLst/>
           </a:prstGeom>
           <a:solidFill>
             <a:srgbClr val="EE6A2C"/>
-          </a:solidFill>
-          <a:ln>
-            <a:noFill/>
-          </a:ln>
-          <a:effectLst/>
-        </p:spPr>
-        <p:style>
-          <a:lnRef idx="1">
-            <a:schemeClr val="accent1"/>
-          </a:lnRef>
-          <a:fillRef idx="3">
-            <a:schemeClr val="accent1"/>
-          </a:fillRef>
-          <a:effectRef idx="2">
-            <a:schemeClr val="accent1"/>
-          </a:effectRef>
-          <a:fontRef idx="minor">
-            <a:schemeClr val="lt1"/>
-          </a:fontRef>
-        </p:style>
-        <p:txBody>
-          <a:bodyPr rtlCol="0" anchor="ctr"/>
-          <a:lstStyle/>
-          <a:p>
-            <a:pPr algn="ctr"/>
-          </a:p>
-        </p:txBody>
-      </p:sp>
-      <p:sp>
-        <p:nvSpPr>
-          <p:cNvPr id="95" name="Rectangle 94"/>
-          <p:cNvSpPr/>
-          <p:nvPr/>
-        </p:nvSpPr>
-        <p:spPr>
-          <a:xfrm>
-            <a:off x="10564368" y="5777788"/>
-            <a:ext cx="475488" cy="13411"/>
-          </a:xfrm>
-          <a:prstGeom prst="rect">
-            <a:avLst/>
-          </a:prstGeom>
-          <a:solidFill>
-            <a:srgbClr val="3E5A78"/>
           </a:solidFill>
           <a:ln>
             <a:noFill/>

--- a/rapports/septembre/Basket4Ballers_sept2026.pptx
+++ b/rapports/septembre/Basket4Ballers_sept2026.pptx
@@ -6256,7 +6256,7 @@
                 </a:solidFill>
                 <a:latin typeface="Arial"/>
               </a:rPr>
-              <a:t>Chaussures et sneakers</a:t>
+              <a:t>Chaussures et sneakers · 14 %</a:t>
             </a:r>
           </a:p>
         </p:txBody>
@@ -6335,7 +6335,7 @@
                 </a:solidFill>
                 <a:latin typeface="Arial"/>
               </a:rPr>
-              <a:t>Équipement de basketball · 5 %</a:t>
+              <a:t>Équipement de basketball · 47 %</a:t>
             </a:r>
           </a:p>
         </p:txBody>
@@ -6414,7 +6414,7 @@
                 </a:solidFill>
                 <a:latin typeface="Arial"/>
               </a:rPr>
-              <a:t>Maillots et fanwear NBA · 4 %</a:t>
+              <a:t>Maillots et fanwear NBA · 9 %</a:t>
             </a:r>
           </a:p>
         </p:txBody>
@@ -6493,7 +6493,7 @@
                 </a:solidFill>
                 <a:latin typeface="Arial"/>
               </a:rPr>
-              <a:t>Vêtements de basketball · 1 %</a:t>
+              <a:t>Vêtements de basketball · 30 %</a:t>
             </a:r>
           </a:p>
         </p:txBody>
@@ -6507,7 +6507,7 @@
         <p:spPr>
           <a:xfrm>
             <a:off x="10564368" y="4450080"/>
-            <a:ext cx="475488" cy="1207008"/>
+            <a:ext cx="475488" cy="187756"/>
           </a:xfrm>
           <a:prstGeom prst="rect">
             <a:avLst/>
@@ -6544,49 +6544,14 @@
       </p:sp>
       <p:sp>
         <p:nvSpPr>
-          <p:cNvPr id="89" name="TextBox 88"/>
-          <p:cNvSpPr txBox="1"/>
-          <p:nvPr/>
-        </p:nvSpPr>
-        <p:spPr>
-          <a:xfrm>
-            <a:off x="10564368" y="4450080"/>
-            <a:ext cx="475488" cy="1207008"/>
-          </a:xfrm>
-          <a:prstGeom prst="rect">
-            <a:avLst/>
-          </a:prstGeom>
-          <a:noFill/>
-        </p:spPr>
-        <p:txBody>
-          <a:bodyPr wrap="square" anchor="ctr" lIns="0" rIns="0" tIns="0" bIns="0">
-            <a:spAutoFit/>
-          </a:bodyPr>
-          <a:lstStyle/>
-          <a:p>
-            <a:pPr algn="ctr"/>
-            <a:r>
-              <a:rPr sz="1000" b="1" i="0">
-                <a:solidFill>
-                  <a:srgbClr val="FFFFFF"/>
-                </a:solidFill>
-                <a:latin typeface="Arial"/>
-              </a:rPr>
-              <a:t>90 %</a:t>
-            </a:r>
-          </a:p>
-        </p:txBody>
-      </p:sp>
-      <p:sp>
-        <p:nvSpPr>
-          <p:cNvPr id="90" name="Rectangle 89"/>
+          <p:cNvPr id="89" name="Rectangle 88"/>
           <p:cNvSpPr/>
           <p:nvPr/>
         </p:nvSpPr>
         <p:spPr>
           <a:xfrm>
-            <a:off x="10564368" y="5657088"/>
-            <a:ext cx="475488" cy="67056"/>
+            <a:off x="10564368" y="4637836"/>
+            <a:ext cx="475488" cy="630326"/>
           </a:xfrm>
           <a:prstGeom prst="rect">
             <a:avLst/>
@@ -6623,14 +6588,49 @@
       </p:sp>
       <p:sp>
         <p:nvSpPr>
+          <p:cNvPr id="90" name="TextBox 89"/>
+          <p:cNvSpPr txBox="1"/>
+          <p:nvPr/>
+        </p:nvSpPr>
+        <p:spPr>
+          <a:xfrm>
+            <a:off x="10564368" y="4637836"/>
+            <a:ext cx="475488" cy="630326"/>
+          </a:xfrm>
+          <a:prstGeom prst="rect">
+            <a:avLst/>
+          </a:prstGeom>
+          <a:noFill/>
+        </p:spPr>
+        <p:txBody>
+          <a:bodyPr wrap="square" anchor="ctr" lIns="0" rIns="0" tIns="0" bIns="0">
+            <a:spAutoFit/>
+          </a:bodyPr>
+          <a:lstStyle/>
+          <a:p>
+            <a:pPr algn="ctr"/>
+            <a:r>
+              <a:rPr sz="1000" b="1" i="0">
+                <a:solidFill>
+                  <a:srgbClr val="FFFFFF"/>
+                </a:solidFill>
+                <a:latin typeface="Arial"/>
+              </a:rPr>
+              <a:t>47 %</a:t>
+            </a:r>
+          </a:p>
+        </p:txBody>
+      </p:sp>
+      <p:sp>
+        <p:nvSpPr>
           <p:cNvPr id="91" name="Rectangle 90"/>
           <p:cNvSpPr/>
           <p:nvPr/>
         </p:nvSpPr>
         <p:spPr>
           <a:xfrm>
-            <a:off x="10564368" y="5724144"/>
-            <a:ext cx="475488" cy="53644"/>
+            <a:off x="10564368" y="5268163"/>
+            <a:ext cx="475488" cy="120700"/>
           </a:xfrm>
           <a:prstGeom prst="rect">
             <a:avLst/>
@@ -6673,8 +6673,8 @@
         </p:nvSpPr>
         <p:spPr>
           <a:xfrm>
-            <a:off x="10564368" y="5777788"/>
-            <a:ext cx="475488" cy="13411"/>
+            <a:off x="10564368" y="5388863"/>
+            <a:ext cx="475488" cy="402336"/>
           </a:xfrm>
           <a:prstGeom prst="rect">
             <a:avLst/>
@@ -6706,6 +6706,41 @@
           <a:lstStyle/>
           <a:p>
             <a:pPr algn="ctr"/>
+          </a:p>
+        </p:txBody>
+      </p:sp>
+      <p:sp>
+        <p:nvSpPr>
+          <p:cNvPr id="93" name="TextBox 92"/>
+          <p:cNvSpPr txBox="1"/>
+          <p:nvPr/>
+        </p:nvSpPr>
+        <p:spPr>
+          <a:xfrm>
+            <a:off x="10564368" y="5388863"/>
+            <a:ext cx="475488" cy="402336"/>
+          </a:xfrm>
+          <a:prstGeom prst="rect">
+            <a:avLst/>
+          </a:prstGeom>
+          <a:noFill/>
+        </p:spPr>
+        <p:txBody>
+          <a:bodyPr wrap="square" anchor="ctr" lIns="0" rIns="0" tIns="0" bIns="0">
+            <a:spAutoFit/>
+          </a:bodyPr>
+          <a:lstStyle/>
+          <a:p>
+            <a:pPr algn="ctr"/>
+            <a:r>
+              <a:rPr sz="1000" b="1" i="0">
+                <a:solidFill>
+                  <a:srgbClr val="FFFFFF"/>
+                </a:solidFill>
+                <a:latin typeface="Arial"/>
+              </a:rPr>
+              <a:t>30 %</a:t>
+            </a:r>
           </a:p>
         </p:txBody>
       </p:sp>
@@ -7110,7 +7145,7 @@
                 </a:solidFill>
                 <a:latin typeface="Arial"/>
               </a:rPr>
-              <a:t>Recentrer la diffusion sur l'univers basket et sneakers</a:t>
+              <a:t>Mettre en avant les accessoires et les protections</a:t>
             </a:r>
           </a:p>
         </p:txBody>
@@ -7145,7 +7180,7 @@
                 </a:solidFill>
                 <a:latin typeface="Arial"/>
               </a:rPr>
-              <a:t>Les conversations captées portent à 71 % sur des chaussures de ville et de mode (mocassins, ballerines, bottines). Le basket-ball pèse moins de 1 % des produits nommés.</a:t>
+              <a:t>Les accessoires (1,12 fois le CTR moyen), les ballons (1,20 fois) et les protections (1,05 fois) font mieux que la moyenne. Le ballon Nike Skills enfant atteint 1,36 fois.</a:t>
             </a:r>
           </a:p>
         </p:txBody>
@@ -7180,7 +7215,7 @@
                 </a:solidFill>
                 <a:latin typeface="Arial"/>
               </a:rPr>
-              <a:t>→  Resserrer les topics ciblés autour des sneakers, du basket et du streetwear pour toucher une audience plus proche du catalogue.</a:t>
+              <a:t>→  Donner plus de place aux accessoires et petits équipements dans la diffusion.</a:t>
             </a:r>
           </a:p>
         </p:txBody>
@@ -7296,7 +7331,7 @@
                 </a:solidFill>
                 <a:latin typeface="Arial"/>
               </a:rPr>
-              <a:t>Mettre en avant les modèles iconiques</a:t>
+              <a:t>Revoir les annonces vêtements et maillots</a:t>
             </a:r>
           </a:p>
         </p:txBody>
@@ -7331,7 +7366,7 @@
                 </a:solidFill>
                 <a:latin typeface="Arial"/>
               </a:rPr>
-              <a:t>Une recherche sur cinq (19,5 %) nomme déjà une marque ou un modèle : Air Force 1, Air Max 90, Cortez, New Balance 237 et 574 reviennent le plus.</a:t>
+              <a:t>Les tenues de basket restent à 0,58 fois la moyenne et les maillots à 0,82 fois. Les survêtements et les casquettes tombent à 0,41 fois.</a:t>
             </a:r>
           </a:p>
         </p:txBody>
@@ -7366,7 +7401,7 @@
                 </a:solidFill>
                 <a:latin typeface="Arial"/>
               </a:rPr>
-              <a:t>→  Construire les accroches autour des modèles cités : « Trouvez votre paire d'Air Force 1 », puis la page produit.</a:t>
+              <a:t>→  Associer les vêtements à un usage (match, échauffement, cadeau) plutôt qu'au prix.</a:t>
             </a:r>
           </a:p>
         </p:txBody>
@@ -7482,7 +7517,7 @@
                 </a:solidFill>
                 <a:latin typeface="Arial"/>
               </a:rPr>
-              <a:t>Exister face aux marques et aux grandes enseignes</a:t>
+              <a:t>Les sneakers lifestyle tiennent leur rang</a:t>
             </a:r>
           </a:p>
         </p:txBody>
@@ -7517,7 +7552,7 @@
                 </a:solidFill>
                 <a:latin typeface="Arial"/>
               </a:rPr>
-              <a:t>Basket4Ballers pèse 0,3 % de part de voix (12e) et reste sous 0,1 % des recommandations spontanées des IA, où Courir atteint 10,7 %. Côté ads, la part de voix monte à 12,3 % (+2,6 pts).</a:t>
+              <a:t>Les chaussures et sneakers dépassent la moyenne (jusqu'à 1,11 fois), avec des modèles comme l'adidas Yung-1 ou la Puma Creeper.</a:t>
             </a:r>
           </a:p>
         </p:txBody>
@@ -7552,7 +7587,7 @@
                 </a:solidFill>
                 <a:latin typeface="Arial"/>
               </a:rPr>
-              <a:t>→  Maintenir la présence publicitaire et développer des contenus experts (guides de tailles, comparatifs de modèles) pour être recommandé spontanément.</a:t>
+              <a:t>→  Pousser les modèles iconiques et les nouveautés lifestyle.</a:t>
             </a:r>
           </a:p>
         </p:txBody>
@@ -7668,7 +7703,7 @@
                 </a:solidFill>
                 <a:latin typeface="Arial"/>
               </a:rPr>
-              <a:t>Parler confort et usage quotidien</a:t>
+              <a:t>Les clics triplent</a:t>
             </a:r>
           </a:p>
         </p:txBody>
@@ -7703,7 +7738,7 @@
                 </a:solidFill>
                 <a:latin typeface="Arial"/>
               </a:rPr>
-              <a:t>Les clics sont multipliés par 3 avec seulement 33 % d'impressions en plus : le CTR passe de 0,20 % à 0,45 %. Les requêtes cherchent des baskets « solides », « pas chères » et pour « marcher toute la journée ».</a:t>
+              <a:t>Les clics passent de 1 083 à 3 198 pour 33 % d'impressions en plus. Le CTR passe de 0,20 % à 0,45 %.</a:t>
             </a:r>
           </a:p>
         </p:txBody>
@@ -7738,7 +7773,7 @@
                 </a:solidFill>
                 <a:latin typeface="Arial"/>
               </a:rPr>
-              <a:t>→  Associer chaque modèle à un usage concret : confort toute la journée, look avec un jean, polyvalence ville et sport.</a:t>
+              <a:t>→  Garder le ciblage et concentrer le budget sur les catégories qui cliquent le plus.</a:t>
             </a:r>
           </a:p>
         </p:txBody>

--- a/rapports/septembre/Basket4Ballers_sept2026.pptx
+++ b/rapports/septembre/Basket4Ballers_sept2026.pptx
@@ -7552,7 +7552,7 @@
                 </a:solidFill>
                 <a:latin typeface="Arial"/>
               </a:rPr>
-              <a:t>Les chaussures et sneakers dépassent la moyenne (jusqu'à 1,11 fois), avec des modèles comme l'adidas Yung-1 ou la Puma Creeper.</a:t>
+              <a:t>Les chaussures et sneakers dépassent la moyenne (jusqu'à 1,11 fois), avec des modèles comme l'adidas Yung-1 ou la Puma Platform Elements.</a:t>
             </a:r>
           </a:p>
         </p:txBody>

--- a/rapports/septembre/Basket4Ballers_sept2026.pptx
+++ b/rapports/septembre/Basket4Ballers_sept2026.pptx
@@ -5283,22 +5283,22 @@
               </a:spcAft>
             </a:pPr>
             <a:r>
+              <a:rPr sz="2000" b="1" i="0">
+                <a:solidFill>
+                  <a:srgbClr val="EE6A2C"/>
+                </a:solidFill>
+                <a:latin typeface="Arial"/>
+              </a:rPr>
+              <a:t>Jordan</a:t>
+            </a:r>
+            <a:r>
               <a:rPr sz="1800" b="1" i="0">
                 <a:solidFill>
-                  <a:srgbClr val="EE6A2C"/>
-                </a:solidFill>
-                <a:latin typeface="Arial"/>
-              </a:rPr>
-              <a:t>sneakers blanches</a:t>
-            </a:r>
-            <a:r>
-              <a:rPr sz="1600" b="1" i="0">
-                <a:solidFill>
                   <a:srgbClr val="111111"/>
                 </a:solidFill>
                 <a:latin typeface="Arial"/>
               </a:rPr>
-              <a:t>   jean</a:t>
+              <a:t>   Nike</a:t>
             </a:r>
           </a:p>
           <a:p>
@@ -5314,7 +5314,7 @@
                 </a:solidFill>
                 <a:latin typeface="Arial"/>
               </a:rPr>
-              <a:t>Air Force 1</a:t>
+              <a:t>genouillères</a:t>
             </a:r>
             <a:r>
               <a:rPr sz="1400" b="1" i="0">
@@ -5323,7 +5323,7 @@
                 </a:solidFill>
                 <a:latin typeface="Arial"/>
               </a:rPr>
-              <a:t>   Air Max 90</a:t>
+              <a:t>   ballon de basket</a:t>
             </a:r>
           </a:p>
           <a:p>
@@ -5339,7 +5339,7 @@
                 </a:solidFill>
                 <a:latin typeface="Arial"/>
               </a:rPr>
-              <a:t>New Balance 574</a:t>
+              <a:t>maillots NBA</a:t>
             </a:r>
             <a:r>
               <a:rPr sz="1200" b="0" i="0">
@@ -5348,7 +5348,7 @@
                 </a:solidFill>
                 <a:latin typeface="Arial"/>
               </a:rPr>
-              <a:t>   Cortez</a:t>
+              <a:t>   survêtements</a:t>
             </a:r>
           </a:p>
           <a:p>
@@ -5364,7 +5364,7 @@
                 </a:solidFill>
                 <a:latin typeface="Arial"/>
               </a:rPr>
-              <a:t>marcher toute la journée</a:t>
+              <a:t>Air Force 1</a:t>
             </a:r>
             <a:r>
               <a:rPr sz="1100" b="1" i="0">
@@ -5373,7 +5373,7 @@
                 </a:solidFill>
                 <a:latin typeface="Arial"/>
               </a:rPr>
-              <a:t>   confort</a:t>
+              <a:t>   short de compression</a:t>
             </a:r>
           </a:p>
           <a:p>
@@ -5389,7 +5389,7 @@
                 </a:solidFill>
                 <a:latin typeface="Arial"/>
               </a:rPr>
-              <a:t>Nike P-6000</a:t>
+              <a:t>Équipe de France</a:t>
             </a:r>
             <a:r>
               <a:rPr sz="1100" b="0" i="0">
@@ -5398,7 +5398,7 @@
                 </a:solidFill>
                 <a:latin typeface="Arial"/>
               </a:rPr>
-              <a:t>   running</a:t>
+              <a:t>   Paris Basketball</a:t>
             </a:r>
             <a:r>
               <a:rPr sz="1100" b="1" i="0">
@@ -5407,7 +5407,7 @@
                 </a:solidFill>
                 <a:latin typeface="Arial"/>
               </a:rPr>
-              <a:t>   pas chères</a:t>
+              <a:t>   McDavid</a:t>
             </a:r>
           </a:p>
           <a:p>
@@ -5423,7 +5423,7 @@
                 </a:solidFill>
                 <a:latin typeface="Arial"/>
               </a:rPr>
-              <a:t>Wilson Authentic</a:t>
+              <a:t>enfant</a:t>
             </a:r>
             <a:r>
               <a:rPr sz="1100" b="0" i="0">
@@ -5432,7 +5432,7 @@
                 </a:solidFill>
                 <a:latin typeface="Arial"/>
               </a:rPr>
-              <a:t>   ballon de basket</a:t>
+              <a:t>   sneakers</a:t>
             </a:r>
           </a:p>
         </p:txBody>
@@ -5616,7 +5616,7 @@
                 </a:solidFill>
                 <a:latin typeface="Arial"/>
               </a:rPr>
-              <a:t>Des idées de sneakers blanches qui vont bien avec ce jean</a:t>
+              <a:t>Je peux utiliser le Wilson Authentic en salle sans l'abîmer ?</a:t>
             </a:r>
           </a:p>
         </p:txBody>
@@ -5730,7 +5730,7 @@
                 </a:solidFill>
                 <a:latin typeface="Arial"/>
               </a:rPr>
-              <a:t>Montre-moi des baskets solides et pas chères pour marcher beaucoup</a:t>
+              <a:t>Des idées de sneakers blanches qui vont bien avec ce jean</a:t>
             </a:r>
           </a:p>
         </p:txBody>
@@ -5844,52 +5844,43 @@
                 </a:solidFill>
                 <a:latin typeface="Arial"/>
               </a:rPr>
-              <a:t>Je peux porter la P-6000 pour courir régulièrement ?</a:t>
-            </a:r>
-          </a:p>
-        </p:txBody>
-      </p:sp>
-      <p:sp>
-        <p:nvSpPr>
-          <p:cNvPr id="71" name="Rectangle 70"/>
-          <p:cNvSpPr/>
-          <p:nvPr/>
-        </p:nvSpPr>
-        <p:spPr>
-          <a:xfrm>
-            <a:off x="4437888" y="5364480"/>
-            <a:ext cx="2913888" cy="304800"/>
-          </a:xfrm>
-          <a:prstGeom prst="rect">
-            <a:avLst/>
-          </a:prstGeom>
-          <a:solidFill>
-            <a:srgbClr val="F1EFEA"/>
-          </a:solidFill>
-          <a:ln>
-            <a:noFill/>
-          </a:ln>
-          <a:effectLst/>
-        </p:spPr>
-        <p:style>
-          <a:lnRef idx="1">
-            <a:schemeClr val="accent1"/>
-          </a:lnRef>
-          <a:fillRef idx="3">
-            <a:schemeClr val="accent1"/>
-          </a:fillRef>
-          <a:effectRef idx="2">
-            <a:schemeClr val="accent1"/>
-          </a:effectRef>
-          <a:fontRef idx="minor">
-            <a:schemeClr val="lt1"/>
-          </a:fontRef>
-        </p:style>
-        <p:txBody>
-          <a:bodyPr rtlCol="0" anchor="ctr"/>
-          <a:lstStyle/>
-          <a:p>
-            <a:pPr algn="ctr"/>
+              <a:t>Montre-moi des baskets solides et pas chères pour marcher beaucoup</a:t>
+            </a:r>
+          </a:p>
+        </p:txBody>
+      </p:sp>
+      <p:sp>
+        <p:nvSpPr>
+          <p:cNvPr id="71" name="TextBox 70"/>
+          <p:cNvSpPr txBox="1"/>
+          <p:nvPr/>
+        </p:nvSpPr>
+        <p:spPr>
+          <a:xfrm>
+            <a:off x="8101584" y="3767328"/>
+            <a:ext cx="2926080" cy="152400"/>
+          </a:xfrm>
+          <a:prstGeom prst="rect">
+            <a:avLst/>
+          </a:prstGeom>
+          <a:noFill/>
+        </p:spPr>
+        <p:txBody>
+          <a:bodyPr wrap="square" anchor="t" lIns="0" rIns="0" tIns="0" bIns="0">
+            <a:spAutoFit/>
+          </a:bodyPr>
+          <a:lstStyle/>
+          <a:p>
+            <a:pPr algn="l"/>
+            <a:r>
+              <a:rPr sz="1300" b="1" i="0">
+                <a:solidFill>
+                  <a:srgbClr val="555B66"/>
+                </a:solidFill>
+                <a:latin typeface="Arial"/>
+              </a:rPr>
+              <a:t>CATÉGORIES DE PRODUITS</a:t>
+            </a:r>
           </a:p>
         </p:txBody>
       </p:sp>
@@ -5901,8 +5892,8 @@
         </p:nvSpPr>
         <p:spPr>
           <a:xfrm>
-            <a:off x="4559808" y="5364480"/>
-            <a:ext cx="182880" cy="304800"/>
+            <a:off x="8101584" y="3992880"/>
+            <a:ext cx="2926080" cy="121920"/>
           </a:xfrm>
           <a:prstGeom prst="rect">
             <a:avLst/>
@@ -5910,20 +5901,20 @@
           <a:noFill/>
         </p:spPr>
         <p:txBody>
-          <a:bodyPr wrap="square" anchor="ctr" lIns="0" rIns="0" tIns="0" bIns="0">
+          <a:bodyPr wrap="square" anchor="t" lIns="0" rIns="0" tIns="0" bIns="0">
             <a:spAutoFit/>
           </a:bodyPr>
           <a:lstStyle/>
           <a:p>
             <a:pPr algn="l"/>
             <a:r>
-              <a:rPr sz="900" b="0" i="0">
-                <a:solidFill>
-                  <a:srgbClr val="555B66"/>
-                </a:solidFill>
-                <a:latin typeface="Arial"/>
-              </a:rPr>
-              <a:t>🔍</a:t>
+              <a:rPr sz="1000" b="0" i="1">
+                <a:solidFill>
+                  <a:srgbClr val="8A93A6"/>
+                </a:solidFill>
+                <a:latin typeface="Arial"/>
+              </a:rPr>
+              <a:t>Répartition des requêtes</a:t>
             </a:r>
           </a:p>
         </p:txBody>
@@ -5936,157 +5927,8 @@
         </p:nvSpPr>
         <p:spPr>
           <a:xfrm>
-            <a:off x="4791456" y="5364480"/>
-            <a:ext cx="2499360" cy="304800"/>
-          </a:xfrm>
-          <a:prstGeom prst="rect">
-            <a:avLst/>
-          </a:prstGeom>
-          <a:noFill/>
-        </p:spPr>
-        <p:txBody>
-          <a:bodyPr wrap="square" anchor="ctr" lIns="0" rIns="0" tIns="0" bIns="0">
-            <a:spAutoFit/>
-          </a:bodyPr>
-          <a:lstStyle/>
-          <a:p>
-            <a:pPr algn="l"/>
-            <a:r>
-              <a:rPr sz="900" b="0" i="0">
-                <a:solidFill>
-                  <a:srgbClr val="111111"/>
-                </a:solidFill>
-                <a:latin typeface="Arial"/>
-              </a:rPr>
-              <a:t>Quels types de lacets aident les sneakers à mieux s'ajuster ?</a:t>
-            </a:r>
-          </a:p>
-        </p:txBody>
-      </p:sp>
-      <p:sp>
-        <p:nvSpPr>
-          <p:cNvPr id="74" name="Rectangle 73"/>
-          <p:cNvSpPr/>
-          <p:nvPr/>
-        </p:nvSpPr>
-        <p:spPr>
-          <a:xfrm>
-            <a:off x="4437888" y="5730240"/>
-            <a:ext cx="2913888" cy="304800"/>
-          </a:xfrm>
-          <a:prstGeom prst="rect">
-            <a:avLst/>
-          </a:prstGeom>
-          <a:solidFill>
-            <a:srgbClr val="F1EFEA"/>
-          </a:solidFill>
-          <a:ln>
-            <a:noFill/>
-          </a:ln>
-          <a:effectLst/>
-        </p:spPr>
-        <p:style>
-          <a:lnRef idx="1">
-            <a:schemeClr val="accent1"/>
-          </a:lnRef>
-          <a:fillRef idx="3">
-            <a:schemeClr val="accent1"/>
-          </a:fillRef>
-          <a:effectRef idx="2">
-            <a:schemeClr val="accent1"/>
-          </a:effectRef>
-          <a:fontRef idx="minor">
-            <a:schemeClr val="lt1"/>
-          </a:fontRef>
-        </p:style>
-        <p:txBody>
-          <a:bodyPr rtlCol="0" anchor="ctr"/>
-          <a:lstStyle/>
-          <a:p>
-            <a:pPr algn="ctr"/>
-          </a:p>
-        </p:txBody>
-      </p:sp>
-      <p:sp>
-        <p:nvSpPr>
-          <p:cNvPr id="75" name="TextBox 74"/>
-          <p:cNvSpPr txBox="1"/>
-          <p:nvPr/>
-        </p:nvSpPr>
-        <p:spPr>
-          <a:xfrm>
-            <a:off x="4559808" y="5730240"/>
-            <a:ext cx="182880" cy="304800"/>
-          </a:xfrm>
-          <a:prstGeom prst="rect">
-            <a:avLst/>
-          </a:prstGeom>
-          <a:noFill/>
-        </p:spPr>
-        <p:txBody>
-          <a:bodyPr wrap="square" anchor="ctr" lIns="0" rIns="0" tIns="0" bIns="0">
-            <a:spAutoFit/>
-          </a:bodyPr>
-          <a:lstStyle/>
-          <a:p>
-            <a:pPr algn="l"/>
-            <a:r>
-              <a:rPr sz="900" b="0" i="0">
-                <a:solidFill>
-                  <a:srgbClr val="555B66"/>
-                </a:solidFill>
-                <a:latin typeface="Arial"/>
-              </a:rPr>
-              <a:t>🔍</a:t>
-            </a:r>
-          </a:p>
-        </p:txBody>
-      </p:sp>
-      <p:sp>
-        <p:nvSpPr>
-          <p:cNvPr id="76" name="TextBox 75"/>
-          <p:cNvSpPr txBox="1"/>
-          <p:nvPr/>
-        </p:nvSpPr>
-        <p:spPr>
-          <a:xfrm>
-            <a:off x="4791456" y="5730240"/>
-            <a:ext cx="2499360" cy="304800"/>
-          </a:xfrm>
-          <a:prstGeom prst="rect">
-            <a:avLst/>
-          </a:prstGeom>
-          <a:noFill/>
-        </p:spPr>
-        <p:txBody>
-          <a:bodyPr wrap="square" anchor="ctr" lIns="0" rIns="0" tIns="0" bIns="0">
-            <a:spAutoFit/>
-          </a:bodyPr>
-          <a:lstStyle/>
-          <a:p>
-            <a:pPr algn="l"/>
-            <a:r>
-              <a:rPr sz="900" b="0" i="0">
-                <a:solidFill>
-                  <a:srgbClr val="111111"/>
-                </a:solidFill>
-                <a:latin typeface="Arial"/>
-              </a:rPr>
-              <a:t>Je peux utiliser le Wilson Authentic en salle sans l'abîmer ?</a:t>
-            </a:r>
-          </a:p>
-        </p:txBody>
-      </p:sp>
-      <p:sp>
-        <p:nvSpPr>
-          <p:cNvPr id="77" name="TextBox 76"/>
-          <p:cNvSpPr txBox="1"/>
-          <p:nvPr/>
-        </p:nvSpPr>
-        <p:spPr>
-          <a:xfrm>
-            <a:off x="8101584" y="3767328"/>
-            <a:ext cx="2926080" cy="152400"/>
+            <a:off x="10607040" y="4175760"/>
+            <a:ext cx="518160" cy="121920"/>
           </a:xfrm>
           <a:prstGeom prst="rect">
             <a:avLst/>
@@ -6099,76 +5941,6 @@
           </a:bodyPr>
           <a:lstStyle/>
           <a:p>
-            <a:pPr algn="l"/>
-            <a:r>
-              <a:rPr sz="1300" b="1" i="0">
-                <a:solidFill>
-                  <a:srgbClr val="555B66"/>
-                </a:solidFill>
-                <a:latin typeface="Arial"/>
-              </a:rPr>
-              <a:t>CATÉGORIES DE PRODUITS</a:t>
-            </a:r>
-          </a:p>
-        </p:txBody>
-      </p:sp>
-      <p:sp>
-        <p:nvSpPr>
-          <p:cNvPr id="78" name="TextBox 77"/>
-          <p:cNvSpPr txBox="1"/>
-          <p:nvPr/>
-        </p:nvSpPr>
-        <p:spPr>
-          <a:xfrm>
-            <a:off x="8101584" y="3992880"/>
-            <a:ext cx="2926080" cy="121920"/>
-          </a:xfrm>
-          <a:prstGeom prst="rect">
-            <a:avLst/>
-          </a:prstGeom>
-          <a:noFill/>
-        </p:spPr>
-        <p:txBody>
-          <a:bodyPr wrap="square" anchor="t" lIns="0" rIns="0" tIns="0" bIns="0">
-            <a:spAutoFit/>
-          </a:bodyPr>
-          <a:lstStyle/>
-          <a:p>
-            <a:pPr algn="l"/>
-            <a:r>
-              <a:rPr sz="1000" b="0" i="1">
-                <a:solidFill>
-                  <a:srgbClr val="8A93A6"/>
-                </a:solidFill>
-                <a:latin typeface="Arial"/>
-              </a:rPr>
-              <a:t>Répartition des requêtes</a:t>
-            </a:r>
-          </a:p>
-        </p:txBody>
-      </p:sp>
-      <p:sp>
-        <p:nvSpPr>
-          <p:cNvPr id="79" name="TextBox 78"/>
-          <p:cNvSpPr txBox="1"/>
-          <p:nvPr/>
-        </p:nvSpPr>
-        <p:spPr>
-          <a:xfrm>
-            <a:off x="10607040" y="4175760"/>
-            <a:ext cx="518160" cy="121920"/>
-          </a:xfrm>
-          <a:prstGeom prst="rect">
-            <a:avLst/>
-          </a:prstGeom>
-          <a:noFill/>
-        </p:spPr>
-        <p:txBody>
-          <a:bodyPr wrap="square" anchor="t" lIns="0" rIns="0" tIns="0" bIns="0">
-            <a:spAutoFit/>
-          </a:bodyPr>
-          <a:lstStyle/>
-          <a:p>
             <a:pPr algn="r"/>
             <a:r>
               <a:rPr sz="1100" b="1" i="0">
@@ -6184,7 +5956,7 @@
       </p:sp>
       <p:sp>
         <p:nvSpPr>
-          <p:cNvPr id="80" name="Rectangle 79"/>
+          <p:cNvPr id="74" name="Rectangle 73"/>
           <p:cNvSpPr/>
           <p:nvPr/>
         </p:nvSpPr>
@@ -6228,7 +6000,7 @@
       </p:sp>
       <p:sp>
         <p:nvSpPr>
-          <p:cNvPr id="81" name="TextBox 80"/>
+          <p:cNvPr id="75" name="TextBox 74"/>
           <p:cNvSpPr txBox="1"/>
           <p:nvPr/>
         </p:nvSpPr>
@@ -6263,7 +6035,7 @@
       </p:sp>
       <p:sp>
         <p:nvSpPr>
-          <p:cNvPr id="82" name="Rectangle 81"/>
+          <p:cNvPr id="76" name="Rectangle 75"/>
           <p:cNvSpPr/>
           <p:nvPr/>
         </p:nvSpPr>
@@ -6307,7 +6079,7 @@
       </p:sp>
       <p:sp>
         <p:nvSpPr>
-          <p:cNvPr id="83" name="TextBox 82"/>
+          <p:cNvPr id="77" name="TextBox 76"/>
           <p:cNvSpPr txBox="1"/>
           <p:nvPr/>
         </p:nvSpPr>
@@ -6342,7 +6114,7 @@
       </p:sp>
       <p:sp>
         <p:nvSpPr>
-          <p:cNvPr id="84" name="Rectangle 83"/>
+          <p:cNvPr id="78" name="Rectangle 77"/>
           <p:cNvSpPr/>
           <p:nvPr/>
         </p:nvSpPr>
@@ -6386,7 +6158,7 @@
       </p:sp>
       <p:sp>
         <p:nvSpPr>
-          <p:cNvPr id="85" name="TextBox 84"/>
+          <p:cNvPr id="79" name="TextBox 78"/>
           <p:cNvSpPr txBox="1"/>
           <p:nvPr/>
         </p:nvSpPr>
@@ -6421,7 +6193,7 @@
       </p:sp>
       <p:sp>
         <p:nvSpPr>
-          <p:cNvPr id="86" name="Rectangle 85"/>
+          <p:cNvPr id="80" name="Rectangle 79"/>
           <p:cNvSpPr/>
           <p:nvPr/>
         </p:nvSpPr>
@@ -6465,7 +6237,7 @@
       </p:sp>
       <p:sp>
         <p:nvSpPr>
-          <p:cNvPr id="87" name="TextBox 86"/>
+          <p:cNvPr id="81" name="TextBox 80"/>
           <p:cNvSpPr txBox="1"/>
           <p:nvPr/>
         </p:nvSpPr>
@@ -6500,7 +6272,7 @@
       </p:sp>
       <p:sp>
         <p:nvSpPr>
-          <p:cNvPr id="88" name="Rectangle 87"/>
+          <p:cNvPr id="82" name="Rectangle 81"/>
           <p:cNvSpPr/>
           <p:nvPr/>
         </p:nvSpPr>
@@ -6544,7 +6316,7 @@
       </p:sp>
       <p:sp>
         <p:nvSpPr>
-          <p:cNvPr id="89" name="Rectangle 88"/>
+          <p:cNvPr id="83" name="Rectangle 82"/>
           <p:cNvSpPr/>
           <p:nvPr/>
         </p:nvSpPr>
@@ -6588,7 +6360,7 @@
       </p:sp>
       <p:sp>
         <p:nvSpPr>
-          <p:cNvPr id="90" name="TextBox 89"/>
+          <p:cNvPr id="84" name="TextBox 83"/>
           <p:cNvSpPr txBox="1"/>
           <p:nvPr/>
         </p:nvSpPr>
@@ -6623,7 +6395,7 @@
       </p:sp>
       <p:sp>
         <p:nvSpPr>
-          <p:cNvPr id="91" name="Rectangle 90"/>
+          <p:cNvPr id="85" name="Rectangle 84"/>
           <p:cNvSpPr/>
           <p:nvPr/>
         </p:nvSpPr>
@@ -6667,7 +6439,7 @@
       </p:sp>
       <p:sp>
         <p:nvSpPr>
-          <p:cNvPr id="92" name="Rectangle 91"/>
+          <p:cNvPr id="86" name="Rectangle 85"/>
           <p:cNvSpPr/>
           <p:nvPr/>
         </p:nvSpPr>
@@ -6711,7 +6483,7 @@
       </p:sp>
       <p:sp>
         <p:nvSpPr>
-          <p:cNvPr id="93" name="TextBox 92"/>
+          <p:cNvPr id="87" name="TextBox 86"/>
           <p:cNvSpPr txBox="1"/>
           <p:nvPr/>
         </p:nvSpPr>
@@ -7331,7 +7103,7 @@
                 </a:solidFill>
                 <a:latin typeface="Arial"/>
               </a:rPr>
-              <a:t>Revoir les annonces vêtements et maillots</a:t>
+              <a:t>Renvoyer vers des fiches produit plutôt que des pages catégorie</a:t>
             </a:r>
           </a:p>
         </p:txBody>
@@ -7366,7 +7138,7 @@
                 </a:solidFill>
                 <a:latin typeface="Arial"/>
               </a:rPr>
-              <a:t>Les tenues de basket restent à 0,58 fois la moyenne et les maillots à 0,82 fois. Les survêtements et les casquettes tombent à 0,41 fois.</a:t>
+              <a:t>Les annonces qui renvoient vers une fiche produit atteignent 1,06 fois le CTR moyen, contre 0,86 fois pour celles qui renvoient vers une page catégorie (survêtements, casquettes, maillots Paris Basketball).</a:t>
             </a:r>
           </a:p>
         </p:txBody>
@@ -7401,7 +7173,7 @@
                 </a:solidFill>
                 <a:latin typeface="Arial"/>
               </a:rPr>
-              <a:t>→  Associer les vêtements à un usage (match, échauffement, cadeau) plutôt qu'au prix.</a:t>
+              <a:t>→  Remplacer les annonces catégorie par des produits précis du flux.</a:t>
             </a:r>
           </a:p>
         </p:txBody>
